--- a/slides/aula2-alura.pptx
+++ b/slides/aula2-alura.pptx
@@ -2639,7 +2639,7 @@
                 <a:ea typeface="Encode Sans" pitchFamily="34" charset="-122"/>
                 <a:cs typeface="Encode Sans" pitchFamily="34" charset="-120"/>
               </a:rPr>
-              <a:t>Rodando o produto contra cada situação</a:t>
+              <a:t>A tensão que eu desenhei</a:t>
             </a:r>
             <a:endParaRPr lang="en-US" sz="6600" dirty="0"/>
           </a:p>
@@ -2720,7 +2720,7 @@
                 <a:ea typeface="Roboto" pitchFamily="34" charset="-122"/>
                 <a:cs typeface="Roboto" pitchFamily="34" charset="-120"/>
               </a:rPr>
-              <a:t>Cadastro estoques e restrições diferentes para cada situação gerada, e mando cada pedido pro Chef Caseiro.</a:t>
+              <a:t>Tenho leite no estoque e a restrição "sem lactose" cadastrada. Vou pedir algo que usa exatamente esse ingrediente.</a:t>
             </a:r>
             <a:endParaRPr lang="en-US" sz="2800" dirty="0"/>
           </a:p>
@@ -2774,7 +2774,7 @@
         <p:spPr>
           <a:xfrm>
             <a:off x="3337560" y="6949440"/>
-            <a:ext cx="17922240" cy="548640"/>
+            <a:ext cx="17922240" cy="1097280"/>
           </a:xfrm>
           <a:prstGeom prst="rect">
             <a:avLst/>
@@ -2801,7 +2801,7 @@
                 <a:ea typeface="Roboto" pitchFamily="34" charset="-122"/>
                 <a:cs typeface="Roboto" pitchFamily="34" charset="-120"/>
               </a:rPr>
-              <a:t>Agora eu tenho várias respostas reais para julgar — não mais uma opinião sobre um caso só.</a:t>
+              <a:t>Se o produto ignorar a restrição, eu vejo isso na hora. Se ele resolver bem, eu também vejo — e aprendo como ele resolve.</a:t>
             </a:r>
             <a:endParaRPr lang="en-US" sz="2800" dirty="0"/>
           </a:p>
@@ -4089,7 +4089,7 @@
                 <a:ea typeface="Roboto" pitchFamily="34" charset="-122"/>
                 <a:cs typeface="Roboto" pitchFamily="34" charset="-120"/>
               </a:rPr>
-              <a:t>Testar com um caso só não prova nada — pedir ajuda ao Claude pra gerar várias situações resolve isso rápido.</a:t>
+              <a:t>Um pedido genérico não testa nada específico — desenhar a tensão certa no pedido é o que revela se um critério aguenta.</a:t>
             </a:r>
             <a:endParaRPr lang="en-US" sz="2800" dirty="0"/>
           </a:p>
@@ -6462,7 +6462,7 @@
                 <a:ea typeface="Encode Sans" pitchFamily="34" charset="-122"/>
                 <a:cs typeface="Encode Sans" pitchFamily="34" charset="-120"/>
               </a:rPr>
-              <a:t>2.3 Pedindo ajuda pra gerar casos de teste</a:t>
+              <a:t>2.3 Desenhando um pedido pra testar o critério</a:t>
             </a:r>
             <a:endParaRPr lang="en-US" sz="9600" dirty="0"/>
           </a:p>
@@ -6623,7 +6623,7 @@
                 <a:ea typeface="Encode Sans" pitchFamily="34" charset="-122"/>
                 <a:cs typeface="Encode Sans" pitchFamily="34" charset="-120"/>
               </a:rPr>
-              <a:t>Um pedido não é suficiente pra confiar em nada</a:t>
+              <a:t>Um pedido qualquer não testa nada específico</a:t>
             </a:r>
             <a:endParaRPr lang="en-US" sz="6600" dirty="0"/>
           </a:p>
@@ -6704,7 +6704,7 @@
                 <a:ea typeface="Roboto" pitchFamily="34" charset="-122"/>
                 <a:cs typeface="Roboto" pitchFamily="34" charset="-120"/>
               </a:rPr>
-              <a:t>Eu testei com um pedido só, na Aula 1. Isso não prova nada — só mostra que funcionou uma vez, com uma pessoa, num dia.</a:t>
+              <a:t>Os dois pedidos da Aula 1 foram genéricos — bons pra conhecer o produto, mas não desenhados pra pressionar nenhum critério em particular.</a:t>
             </a:r>
             <a:endParaRPr lang="en-US" sz="2800" dirty="0"/>
           </a:p>
@@ -6785,7 +6785,7 @@
                 <a:ea typeface="Roboto" pitchFamily="34" charset="-122"/>
                 <a:cs typeface="Roboto" pitchFamily="34" charset="-120"/>
               </a:rPr>
-              <a:t>Vou pedir pro Claude gerar várias situações diferentes de pedido — como se fossem várias pessoas reais perguntando.</a:t>
+              <a:t>Pra testar de verdade o respeito às restrições, eu preciso de um pedido que force essa tensão a aparecer, de propósito.</a:t>
             </a:r>
             <a:endParaRPr lang="en-US" sz="2800" dirty="0"/>
           </a:p>
